--- a/01_분석결과/이니스프리_캡스톤_산출문_최종.pptx
+++ b/01_분석결과/이니스프리_캡스톤_산출문_최종.pptx
@@ -3699,7 +3699,7 @@
                 <a:ea typeface="맑은 고딕" pitchFamily="34" charset="-122"/>
                 <a:cs typeface="맑은 고딕" pitchFamily="34" charset="-120"/>
               </a:rPr>
-              <a:t>제주 연상 비중이 3년째 오른다 = 새 세계관이 안 심겼다. 이탈 사유는 “헤리티지 상실”이었다.</a:t>
+              <a:t>제주 연상 비중이 브랜드 전체보다 오래 버텼다(2024년 0.53% 정점, 2025년 0.52% 보합) = 새 세계관이 안 심겼다. 이탈 사유는 “헤리티지 상실”이었다.</a:t>
             </a:r>
             <a:endParaRPr lang="en-US" sz="1100" dirty="0"/>
           </a:p>
@@ -4882,7 +4882,7 @@
                 <a:ea typeface="맑은 고딕" pitchFamily="34" charset="-122"/>
                 <a:cs typeface="맑은 고딕" pitchFamily="34" charset="-120"/>
               </a:rPr>
-              <a:t>연상 비중 0.79% → 1.87%</a:t>
+              <a:t>연상 비중 0.34% → 0.52%</a:t>
             </a:r>
             <a:endParaRPr lang="en-US" sz="1150" dirty="0"/>
           </a:p>
@@ -5995,7 +5995,7 @@
                 <a:ea typeface="맑은 고딕" pitchFamily="34" charset="-122"/>
                 <a:cs typeface="맑은 고딕" pitchFamily="34" charset="-120"/>
               </a:rPr>
-              <a:t>제주 연상은 3년째 상승 중</a:t>
+              <a:t>제주 연상은 브랜드 전체보다 오래 버텼다(2024년 0.53% 정점, 2025년 보합)</a:t>
             </a:r>
             <a:endParaRPr lang="en-US" sz="1050" dirty="0"/>
           </a:p>
@@ -9627,7 +9627,7 @@
                 <a:ea typeface="맑은 고딕" pitchFamily="34" charset="-122"/>
                 <a:cs typeface="맑은 고딕" pitchFamily="34" charset="-120"/>
               </a:rPr>
-              <a:t>제주 자산 잔존 1.87% [3C]</a:t>
+              <a:t>제주 자산 잔존 0.52% [3C]</a:t>
             </a:r>
             <a:endParaRPr lang="en-US" sz="980" dirty="0"/>
           </a:p>
@@ -14778,7 +14778,7 @@
                 <a:ea typeface="맑은 고딕" pitchFamily="34" charset="-122"/>
                 <a:cs typeface="맑은 고딕" pitchFamily="34" charset="-120"/>
               </a:rPr>
-              <a:t>대조군 2개로 채널 요인 통제 — 아리따움·토니모리</a:t>
+              <a:t>대조군 2개로 채널 요인 통제 — 아리따움·토니모리(2021~2025 한정 — 2026-02부터 붕괴(1~7월 YoY −53.5%)해 대조군 제외, 미샤(−27.1%)로 대체)</a:t>
             </a:r>
             <a:endParaRPr lang="en-US" sz="1080" dirty="0"/>
           </a:p>
@@ -16063,7 +16063,7 @@
                 <a:ea typeface="맑은 고딕" pitchFamily="34" charset="-122"/>
                 <a:cs typeface="맑은 고딕" pitchFamily="34" charset="-120"/>
               </a:rPr>
-              <a:t>모니터링 · 지표 체계</a:t>
+              <a:t>모니터링 · 지표 체계 (제안 단계)</a:t>
             </a:r>
             <a:endParaRPr lang="en-US" sz="1050" dirty="0"/>
           </a:p>
@@ -23490,7 +23490,7 @@
                 <a:ea typeface="맑은 고딕" pitchFamily="34" charset="-122"/>
                 <a:cs typeface="맑은 고딕" pitchFamily="34" charset="-120"/>
               </a:rPr>
-              <a:t>제주 연상 0.79% → 1.87% · “헤리티지가 안 보인다”</a:t>
+              <a:t>제주 연상 0.34% → 0.52% · “헤리티지가 안 보인다”</a:t>
             </a:r>
             <a:endParaRPr lang="en-US" sz="1050" dirty="0"/>
           </a:p>
